--- a/slides/slides_lec_08.pptx
+++ b/slides/slides_lec_08.pptx
@@ -1668,7 +1668,7 @@
         </p:nvSpPr>
         <p:spPr>
           <a:xfrm>
-            <a:off x="822960" y="1371600"/>
+            <a:off x="822960" y="1691640"/>
             <a:ext cx="566928" cy="566928"/>
           </a:xfrm>
           <a:prstGeom prst="ellipse">
@@ -1688,7 +1688,7 @@
         </p:nvSpPr>
         <p:spPr>
           <a:xfrm>
-            <a:off x="822960" y="1371600"/>
+            <a:off x="822960" y="1691640"/>
             <a:ext cx="566928" cy="566928"/>
           </a:xfrm>
           <a:prstGeom prst="rect">
@@ -1727,7 +1727,7 @@
         </p:nvSpPr>
         <p:spPr>
           <a:xfrm>
-            <a:off x="1600200" y="1335024"/>
+            <a:off x="1600200" y="1655064"/>
             <a:ext cx="9418320" cy="457200"/>
           </a:xfrm>
           <a:prstGeom prst="rect">
@@ -1766,7 +1766,7 @@
         </p:nvSpPr>
         <p:spPr>
           <a:xfrm>
-            <a:off x="1600200" y="1874520"/>
+            <a:off x="1600200" y="2194560"/>
             <a:ext cx="9418320" cy="1463040"/>
           </a:xfrm>
           <a:prstGeom prst="rect">
@@ -1808,7 +1808,7 @@
         </p:nvSpPr>
         <p:spPr>
           <a:xfrm>
-            <a:off x="822960" y="3703320"/>
+            <a:off x="822960" y="4087368"/>
             <a:ext cx="566928" cy="566928"/>
           </a:xfrm>
           <a:prstGeom prst="ellipse">
@@ -1828,7 +1828,7 @@
         </p:nvSpPr>
         <p:spPr>
           <a:xfrm>
-            <a:off x="822960" y="3703320"/>
+            <a:off x="822960" y="4087368"/>
             <a:ext cx="566928" cy="566928"/>
           </a:xfrm>
           <a:prstGeom prst="rect">
@@ -1867,7 +1867,7 @@
         </p:nvSpPr>
         <p:spPr>
           <a:xfrm>
-            <a:off x="1600200" y="3666744"/>
+            <a:off x="1600200" y="4050792"/>
             <a:ext cx="9418320" cy="457200"/>
           </a:xfrm>
           <a:prstGeom prst="rect">
@@ -1906,7 +1906,7 @@
         </p:nvSpPr>
         <p:spPr>
           <a:xfrm>
-            <a:off x="1600200" y="4206240"/>
+            <a:off x="1600200" y="4590288"/>
             <a:ext cx="9418320" cy="1463040"/>
           </a:xfrm>
           <a:prstGeom prst="rect">
@@ -2019,7 +2019,7 @@
         </p:nvSpPr>
         <p:spPr>
           <a:xfrm>
-            <a:off x="822960" y="1371600"/>
+            <a:off x="822960" y="1691640"/>
             <a:ext cx="566928" cy="566928"/>
           </a:xfrm>
           <a:prstGeom prst="ellipse">
@@ -2039,7 +2039,7 @@
         </p:nvSpPr>
         <p:spPr>
           <a:xfrm>
-            <a:off x="822960" y="1371600"/>
+            <a:off x="822960" y="1691640"/>
             <a:ext cx="566928" cy="566928"/>
           </a:xfrm>
           <a:prstGeom prst="rect">
@@ -2078,7 +2078,7 @@
         </p:nvSpPr>
         <p:spPr>
           <a:xfrm>
-            <a:off x="1600200" y="1335024"/>
+            <a:off x="1600200" y="1655064"/>
             <a:ext cx="9418320" cy="457200"/>
           </a:xfrm>
           <a:prstGeom prst="rect">
@@ -2117,7 +2117,7 @@
         </p:nvSpPr>
         <p:spPr>
           <a:xfrm>
-            <a:off x="1600200" y="1874520"/>
+            <a:off x="1600200" y="2194560"/>
             <a:ext cx="9418320" cy="1463040"/>
           </a:xfrm>
           <a:prstGeom prst="rect">
@@ -2159,7 +2159,7 @@
         </p:nvSpPr>
         <p:spPr>
           <a:xfrm>
-            <a:off x="822960" y="3703320"/>
+            <a:off x="822960" y="4087368"/>
             <a:ext cx="566928" cy="566928"/>
           </a:xfrm>
           <a:prstGeom prst="ellipse">
@@ -2179,7 +2179,7 @@
         </p:nvSpPr>
         <p:spPr>
           <a:xfrm>
-            <a:off x="822960" y="3703320"/>
+            <a:off x="822960" y="4087368"/>
             <a:ext cx="566928" cy="566928"/>
           </a:xfrm>
           <a:prstGeom prst="rect">
@@ -2218,7 +2218,7 @@
         </p:nvSpPr>
         <p:spPr>
           <a:xfrm>
-            <a:off x="1600200" y="3666744"/>
+            <a:off x="1600200" y="4050792"/>
             <a:ext cx="9418320" cy="457200"/>
           </a:xfrm>
           <a:prstGeom prst="rect">
@@ -2257,7 +2257,7 @@
         </p:nvSpPr>
         <p:spPr>
           <a:xfrm>
-            <a:off x="1600200" y="4206240"/>
+            <a:off x="1600200" y="4590288"/>
             <a:ext cx="9418320" cy="1463040"/>
           </a:xfrm>
           <a:prstGeom prst="rect">
